--- a/Schools_ML_Track/camp_2026/slides/DA/DA16.pptx
+++ b/Schools_ML_Track/camp_2026/slides/DA/DA16.pptx
@@ -131,7 +131,7 @@
   <p:extLst>
     <p:ext uri="{521415D9-36F7-43E2-AB2F-B90AF26B5E84}">
       <p14:sectionLst xmlns:p14="http://schemas.microsoft.com/office/powerpoint/2010/main">
-        <p14:section name="Opening" id="{fa3b4643-312f-a561-e062-fdb7953673a3}">
+        <p14:section name="Opening" id="{225fcfd3-0f7f-4063-6099-4f06eb4ca468}">
           <p14:sldIdLst>
             <p14:sldId id="256"/>
             <p14:sldId id="257"/>
@@ -142,7 +142,7 @@
             <p14:sldId id="262"/>
           </p14:sldIdLst>
         </p14:section>
-        <p14:section name="Block A" id="{6ada536d-86ae-0f11-e8ad-bfe01d930d2c}">
+        <p14:section name="Block A" id="{15972789-eb88-1323-239d-89d7473589f7}">
           <p14:sldIdLst>
             <p14:sldId id="263"/>
             <p14:sldId id="264"/>
@@ -153,15 +153,15 @@
             <p14:sldId id="270"/>
           </p14:sldIdLst>
         </p14:section>
-        <p14:section name="Break" id="{1cab5082-ac5d-dc1a-3baf-4fb078dd6a08}">
+        <p14:section name="Break" id="{c9733077-09cc-1742-e282-ee1f18ba22db}">
           <p14:sldIdLst>
             <p14:sldId id="268"/>
           </p14:sldIdLst>
         </p14:section>
-        <p14:section name="Block A" id="{04ffda06-b89a-cb42-a1b2-4643b879efce}">
+        <p14:section name="Block A" id="{e1897d28-036c-b03e-3f5b-fe1832314eae}">
           <p14:sldIdLst/>
         </p14:section>
-        <p14:section name="Block B" id="{08baba71-405a-9471-c850-16159a5d5539}">
+        <p14:section name="Block B" id="{03494031-7a9c-af19-4af8-37856b5ee3f3}">
           <p14:sldIdLst>
             <p14:sldId id="271"/>
             <p14:sldId id="272"/>
@@ -172,7 +172,7 @@
             <p14:sldId id="277"/>
           </p14:sldIdLst>
         </p14:section>
-        <p14:section name="Make and close" id="{a2114cf8-b324-3f99-7d0a-6ffe9cf80849}">
+        <p14:section name="Make and close" id="{dbb53aaa-6a90-91b2-810d-4d7c88382692}">
           <p14:sldIdLst>
             <p14:sldId id="278"/>
             <p14:sldId id="279"/>

--- a/Schools_ML_Track/camp_2026/slides/DA/DA16.pptx
+++ b/Schools_ML_Track/camp_2026/slides/DA/DA16.pptx
@@ -131,7 +131,7 @@
   <p:extLst>
     <p:ext uri="{521415D9-36F7-43E2-AB2F-B90AF26B5E84}">
       <p14:sectionLst xmlns:p14="http://schemas.microsoft.com/office/powerpoint/2010/main">
-        <p14:section name="Opening" id="{225fcfd3-0f7f-4063-6099-4f06eb4ca468}">
+        <p14:section name="Opening" id="{559178b6-0941-1c34-3acf-a6f2b7cceade}">
           <p14:sldIdLst>
             <p14:sldId id="256"/>
             <p14:sldId id="257"/>
@@ -142,7 +142,7 @@
             <p14:sldId id="262"/>
           </p14:sldIdLst>
         </p14:section>
-        <p14:section name="Block A" id="{15972789-eb88-1323-239d-89d7473589f7}">
+        <p14:section name="Block A" id="{30d27646-fd45-4d44-09d8-a83b235f1a6f}">
           <p14:sldIdLst>
             <p14:sldId id="263"/>
             <p14:sldId id="264"/>
@@ -153,15 +153,15 @@
             <p14:sldId id="270"/>
           </p14:sldIdLst>
         </p14:section>
-        <p14:section name="Break" id="{c9733077-09cc-1742-e282-ee1f18ba22db}">
+        <p14:section name="Break" id="{feccdb55-cfe9-e90f-9f59-3ba621e7a2b1}">
           <p14:sldIdLst>
             <p14:sldId id="268"/>
           </p14:sldIdLst>
         </p14:section>
-        <p14:section name="Block A" id="{e1897d28-036c-b03e-3f5b-fe1832314eae}">
+        <p14:section name="Block A" id="{103f596a-66e5-3629-bda7-299c5775877f}">
           <p14:sldIdLst/>
         </p14:section>
-        <p14:section name="Block B" id="{03494031-7a9c-af19-4af8-37856b5ee3f3}">
+        <p14:section name="Block B" id="{e2eefbda-0915-bb73-bba6-8f55094a59da}">
           <p14:sldIdLst>
             <p14:sldId id="271"/>
             <p14:sldId id="272"/>
@@ -172,7 +172,7 @@
             <p14:sldId id="277"/>
           </p14:sldIdLst>
         </p14:section>
-        <p14:section name="Make and close" id="{dbb53aaa-6a90-91b2-810d-4d7c88382692}">
+        <p14:section name="Make and close" id="{42563b52-360e-d581-4af2-f978963a4297}">
           <p14:sldIdLst>
             <p14:sldId id="278"/>
             <p14:sldId id="279"/>
@@ -1211,7 +1211,8 @@
           <a:p>
             <a:r>
               <a:rPr lang="en-US" dirty="0"/>
-              <a:t>Read this first part of the code with me before we run anything. ['Some units are written as words, such as two.', 'A lookup turns them into numbers.', 'Blank units cannot be repaired, so we exclude those rows and count them.', 'Then we compare with the true total.', 'The two totals will differ, and the difference has a name.']</a:t>
+              <a:t>Some units are written as words, such as two. A lookup turns them into numbers.
+Make a prediction. Predict whether the cleaned revenue will be above, equal to or below the true revenue of 6375900. Guess on paper first. Surprises are useful.</a:t>
             </a:r>
             <a:endParaRPr lang="en-US" dirty="0"/>
           </a:p>
@@ -1299,8 +1300,7 @@
           <a:p>
             <a:r>
               <a:rPr lang="en-US" dirty="0"/>
-              <a:t>Some units are written as words, such as two. A lookup turns them into numbers.
-Make a prediction. Predict whether the cleaned revenue will be above, equal to or below the true revenue of 6375900. Guess on paper first. Surprises are useful.</a:t>
+              <a:t>Here is the rest of the code. Read it through once. Then write your guess on paper before we run anything.</a:t>
             </a:r>
             <a:endParaRPr lang="en-US" dirty="0"/>
           </a:p>
@@ -2645,7 +2645,8 @@
           <a:p>
             <a:r>
               <a:rPr lang="en-US" dirty="0"/>
-              <a:t>Read this first part of the code with me before we run anything. ['The raw export has two date formats in one column: 2026-09-01 and 01/09/2026.', 'Parse each format on its own, and keep the date that worked.', 'Names appear as juice, JUICE and " Juice ".']</a:t>
+              <a:t>The raw export has two date formats in one column: 2026-09-01 and 01/09/2026. Parse each format on its own, and keep the date that worked.
+This is the part where you decide. Predict how many dates cannot be parsed after both formats have been tried. Jot it on paper before anyone speaks.</a:t>
             </a:r>
             <a:endParaRPr lang="en-US" dirty="0"/>
           </a:p>
@@ -2733,8 +2734,7 @@
           <a:p>
             <a:r>
               <a:rPr lang="en-US" dirty="0"/>
-              <a:t>The raw export has two date formats in one column: 2026-09-01 and 01/09/2026. Parse each format on its own, and keep the date that worked.
-This is the part where you decide. Predict how many dates cannot be parsed after both formats have been tried. Jot it on paper before anyone speaks.</a:t>
+              <a:t>Here is the rest of the code. Read it through once. Then write your guess on paper before we run anything.</a:t>
             </a:r>
             <a:endParaRPr lang="en-US" dirty="0"/>
           </a:p>
@@ -5617,7 +5617,7 @@
                 <a:ea typeface="Lato" pitchFamily="34" charset="-122"/>
                 <a:cs typeface="Lato" pitchFamily="34" charset="-120"/>
               </a:rPr>
-              <a:t>Read the first part of the code. 6 lines. Say what each one does.</a:t>
+              <a:t>Predict whether the cleaned revenue will be above, equal to or below the true revenue of 6375900.</a:t>
             </a:r>
             <a:endParaRPr lang="en-US" sz="2400" dirty="0"/>
           </a:p>
@@ -5640,7 +5640,7 @@
                 <a:ea typeface="Lato" pitchFamily="34" charset="-122"/>
                 <a:cs typeface="Lato" pitchFamily="34" charset="-120"/>
               </a:rPr>
-              <a:t>The second part comes next.</a:t>
+              <a:t>The rest of the code is on the next slide.</a:t>
             </a:r>
             <a:endParaRPr lang="en-US" sz="2400" dirty="0"/>
           </a:p>
@@ -6157,7 +6157,7 @@
                 <a:ea typeface="Lato" pitchFamily="34" charset="-122"/>
                 <a:cs typeface="Lato" pitchFamily="34" charset="-120"/>
               </a:rPr>
-              <a:t>Predict whether the cleaned revenue will be above, equal to or below the true revenue of 6375900.</a:t>
+              <a:t>This is the rest of the code. Keep your guess in mind.</a:t>
             </a:r>
             <a:endParaRPr lang="en-US" sz="2400" dirty="0"/>
           </a:p>
@@ -7660,15 +7660,15 @@
           <a:p>
             <a:pPr algn="l" indent="0" marL="0">
               <a:lnSpc>
-                <a:spcPts val="3240"/>
+                <a:spcPts val="2760"/>
               </a:lnSpc>
               <a:spcAft>
-                <a:spcPts val="2520"/>
+                <a:spcPts val="2020"/>
               </a:spcAft>
               <a:buNone/>
             </a:pPr>
             <a:r>
-              <a:rPr lang="en-US" sz="2700" dirty="0">
+              <a:rPr lang="en-US" sz="2300" dirty="0">
                 <a:solidFill>
                   <a:srgbClr val="111111"/>
                 </a:solidFill>
@@ -7676,22 +7676,22 @@
                 <a:ea typeface="Lato" pitchFamily="34" charset="-122"/>
                 <a:cs typeface="Lato" pitchFamily="34" charset="-120"/>
               </a:rPr>
-              <a:t>Put the cleaning steps in one function called clean_sales(raw) that returns the clean table and the excluded rows. Run it on the raw export and check with assert that the clean table has 1473 rows and the clean revenue is 6250500. Write one sentence naming the residual and its cause.</a:t>
-            </a:r>
-            <a:endParaRPr lang="en-US" sz="2700" dirty="0"/>
-          </a:p>
-          <a:p>
-            <a:pPr algn="l" indent="0" marL="0">
-              <a:lnSpc>
-                <a:spcPts val="3240"/>
+              <a:t>Put the cleaning steps in one function called clean_sales(raw) that returns the clean table and the excluded rows.</a:t>
+            </a:r>
+            <a:endParaRPr lang="en-US" sz="2300" dirty="0"/>
+          </a:p>
+          <a:p>
+            <a:pPr algn="l" indent="0" marL="0">
+              <a:lnSpc>
+                <a:spcPts val="2760"/>
               </a:lnSpc>
               <a:spcAft>
-                <a:spcPts val="2520"/>
+                <a:spcPts val="2020"/>
               </a:spcAft>
               <a:buNone/>
             </a:pPr>
             <a:r>
-              <a:rPr lang="en-US" sz="2700" dirty="0">
+              <a:rPr lang="en-US" sz="2300" dirty="0">
                 <a:solidFill>
                   <a:srgbClr val="111111"/>
                 </a:solidFill>
@@ -7699,9 +7699,55 @@
                 <a:ea typeface="Lato" pitchFamily="34" charset="-122"/>
                 <a:cs typeface="Lato" pitchFamily="34" charset="-120"/>
               </a:rPr>
+              <a:t>Run it on the raw export and check with assert that the clean table has 1473 rows and the clean revenue is 6250500.</a:t>
+            </a:r>
+            <a:endParaRPr lang="en-US" sz="2300" dirty="0"/>
+          </a:p>
+          <a:p>
+            <a:pPr algn="l" indent="0" marL="0">
+              <a:lnSpc>
+                <a:spcPts val="2760"/>
+              </a:lnSpc>
+              <a:spcAft>
+                <a:spcPts val="2020"/>
+              </a:spcAft>
+              <a:buNone/>
+            </a:pPr>
+            <a:r>
+              <a:rPr lang="en-US" sz="2300" dirty="0">
+                <a:solidFill>
+                  <a:srgbClr val="111111"/>
+                </a:solidFill>
+                <a:latin typeface="Lato" pitchFamily="34" charset="0"/>
+                <a:ea typeface="Lato" pitchFamily="34" charset="-122"/>
+                <a:cs typeface="Lato" pitchFamily="34" charset="-120"/>
+              </a:rPr>
+              <a:t>Write one sentence naming the residual and its cause.</a:t>
+            </a:r>
+            <a:endParaRPr lang="en-US" sz="2300" dirty="0"/>
+          </a:p>
+          <a:p>
+            <a:pPr algn="l" indent="0" marL="0">
+              <a:lnSpc>
+                <a:spcPts val="2760"/>
+              </a:lnSpc>
+              <a:spcAft>
+                <a:spcPts val="2020"/>
+              </a:spcAft>
+              <a:buNone/>
+            </a:pPr>
+            <a:r>
+              <a:rPr lang="en-US" sz="2300" dirty="0">
+                <a:solidFill>
+                  <a:srgbClr val="111111"/>
+                </a:solidFill>
+                <a:latin typeface="Lato" pitchFamily="34" charset="0"/>
+                <a:ea typeface="Lato" pitchFamily="34" charset="-122"/>
+                <a:cs typeface="Lato" pitchFamily="34" charset="-120"/>
+              </a:rPr>
               <a:t>Save it as DA16. Write two sentences: what you changed and how you checked it.</a:t>
             </a:r>
-            <a:endParaRPr lang="en-US" sz="2700" dirty="0"/>
+            <a:endParaRPr lang="en-US" sz="2300" dirty="0"/>
           </a:p>
         </p:txBody>
       </p:sp>
@@ -8880,158 +8926,9 @@
           </a:ln>
         </p:spPr>
       </p:sp>
-      <p:sp>
-        <p:nvSpPr>
-          <p:cNvPr id="8" name="Text 5"/>
-          <p:cNvSpPr txBox="1"/>
-          <p:nvPr/>
-        </p:nvSpPr>
-        <p:spPr>
-          <a:xfrm>
-            <a:off x="2011680" y="3218688"/>
-            <a:ext cx="2926080" cy="1298448"/>
-          </a:xfrm>
-          <a:prstGeom prst="rect">
-            <a:avLst/>
-          </a:prstGeom>
-          <a:noFill/>
-          <a:ln/>
-        </p:spPr>
-        <p:txBody>
-          <a:bodyPr wrap="square" lIns="0" tIns="0" rIns="0" bIns="0" rtlCol="0" anchor="ctr"/>
-          <a:lstStyle/>
-          <a:p>
-            <a:pPr algn="l" indent="0" marL="0">
-              <a:lnSpc>
-                <a:spcPts val="4080"/>
-              </a:lnSpc>
-              <a:buNone/>
-            </a:pPr>
-            <a:r>
-              <a:rPr lang="en-US" sz="3400" b="1" dirty="0">
-                <a:solidFill>
-                  <a:srgbClr val="111111"/>
-                </a:solidFill>
-                <a:latin typeface="Lato" pitchFamily="34" charset="0"/>
-                <a:ea typeface="Lato" pitchFamily="34" charset="-122"/>
-                <a:cs typeface="Lato" pitchFamily="34" charset="-120"/>
-              </a:rPr>
-              <a:t>normalise</a:t>
-            </a:r>
-            <a:endParaRPr lang="en-US" sz="3400" dirty="0"/>
-          </a:p>
-        </p:txBody>
-      </p:sp>
-      <p:sp>
-        <p:nvSpPr>
-          <p:cNvPr id="9" name="Text 6"/>
-          <p:cNvSpPr txBox="1"/>
-          <p:nvPr/>
-        </p:nvSpPr>
-        <p:spPr>
-          <a:xfrm>
-            <a:off x="5120640" y="3264408"/>
-            <a:ext cx="6400800" cy="868680"/>
-          </a:xfrm>
-          <a:prstGeom prst="rect">
-            <a:avLst/>
-          </a:prstGeom>
-          <a:noFill/>
-          <a:ln/>
-        </p:spPr>
-        <p:txBody>
-          <a:bodyPr wrap="square" lIns="0" tIns="0" rIns="0" bIns="0" rtlCol="0" anchor="t"/>
-          <a:lstStyle/>
-          <a:p>
-            <a:pPr algn="l" indent="0" marL="0">
-              <a:lnSpc>
-                <a:spcPts val="2640"/>
-              </a:lnSpc>
-              <a:buNone/>
-            </a:pPr>
-            <a:r>
-              <a:rPr lang="en-US" sz="2200" dirty="0">
-                <a:solidFill>
-                  <a:srgbClr val="111111"/>
-                </a:solidFill>
-                <a:latin typeface="Lato" pitchFamily="34" charset="0"/>
-                <a:ea typeface="Lato" pitchFamily="34" charset="-122"/>
-                <a:cs typeface="Lato" pitchFamily="34" charset="-120"/>
-              </a:rPr>
-              <a:t>Make the same thing look the same everywhere, such as one spelling and one case.</a:t>
-            </a:r>
-            <a:endParaRPr lang="en-US" sz="2200" dirty="0"/>
-          </a:p>
-        </p:txBody>
-      </p:sp>
-      <p:sp>
-        <p:nvSpPr>
-          <p:cNvPr id="10" name="Text 7"/>
-          <p:cNvSpPr txBox="1"/>
-          <p:nvPr/>
-        </p:nvSpPr>
-        <p:spPr>
-          <a:xfrm>
-            <a:off x="5120640" y="4026408"/>
-            <a:ext cx="6400800" cy="566928"/>
-          </a:xfrm>
-          <a:prstGeom prst="rect">
-            <a:avLst/>
-          </a:prstGeom>
-          <a:noFill/>
-          <a:ln/>
-        </p:spPr>
-        <p:txBody>
-          <a:bodyPr wrap="square" lIns="0" tIns="0" rIns="0" bIns="0" rtlCol="0" anchor="t"/>
-          <a:lstStyle/>
-          <a:p>
-            <a:pPr algn="l" indent="0" marL="0">
-              <a:lnSpc>
-                <a:spcPts val="2280"/>
-              </a:lnSpc>
-              <a:buNone/>
-            </a:pPr>
-            <a:r>
-              <a:rPr lang="en-US" sz="1900" i="1" dirty="0">
-                <a:solidFill>
-                  <a:srgbClr val="666666"/>
-                </a:solidFill>
-                <a:latin typeface="Lato" pitchFamily="34" charset="0"/>
-                <a:ea typeface="Lato" pitchFamily="34" charset="-122"/>
-                <a:cs typeface="Lato" pitchFamily="34" charset="-120"/>
-              </a:rPr>
-              <a:t>Writing every name with a capital first letter.</a:t>
-            </a:r>
-            <a:endParaRPr lang="en-US" sz="1900" dirty="0"/>
-          </a:p>
-        </p:txBody>
-      </p:sp>
-      <p:sp>
-        <p:nvSpPr>
-          <p:cNvPr id="11" name="Shape 8"/>
-          <p:cNvSpPr/>
-          <p:nvPr/>
-        </p:nvSpPr>
-        <p:spPr>
-          <a:xfrm>
-            <a:off x="640080" y="4617720"/>
-            <a:ext cx="10881360" cy="0"/>
-          </a:xfrm>
-          <a:prstGeom prst="line">
-            <a:avLst/>
-          </a:prstGeom>
-          <a:noFill/>
-          <a:ln w="12700">
-            <a:solidFill>
-              <a:srgbClr val="CFCFCF"/>
-            </a:solidFill>
-            <a:prstDash val="solid"/>
-          </a:ln>
-        </p:spPr>
-      </p:sp>
       <p:pic>
         <p:nvPicPr>
-          <p:cNvPr id="12" name="Image 1" descr="lookup">    </p:cNvPr>
+          <p:cNvPr id="8" name="Image 1" descr="normalise">    </p:cNvPr>
           <p:cNvPicPr>
             <a:picLocks noChangeAspect="1"/>
           </p:cNvPicPr>
@@ -9045,7 +8942,7 @@
         </p:blipFill>
         <p:spPr>
           <a:xfrm>
-            <a:off x="640080" y="4745736"/>
+            <a:off x="640080" y="3264408"/>
             <a:ext cx="1188720" cy="1188720"/>
           </a:xfrm>
           <a:prstGeom prst="rect">
@@ -9055,13 +8952,13 @@
       </p:pic>
       <p:sp>
         <p:nvSpPr>
-          <p:cNvPr id="13" name="Text 9"/>
+          <p:cNvPr id="9" name="Text 5"/>
           <p:cNvSpPr txBox="1"/>
           <p:nvPr/>
         </p:nvSpPr>
         <p:spPr>
           <a:xfrm>
-            <a:off x="2011680" y="4700016"/>
+            <a:off x="2011680" y="3218688"/>
             <a:ext cx="2926080" cy="1298448"/>
           </a:xfrm>
           <a:prstGeom prst="rect">
@@ -9089,7 +8986,7 @@
                 <a:ea typeface="Lato" pitchFamily="34" charset="-122"/>
                 <a:cs typeface="Lato" pitchFamily="34" charset="-120"/>
               </a:rPr>
-              <a:t>lookup</a:t>
+              <a:t>normalise</a:t>
             </a:r>
             <a:endParaRPr lang="en-US" sz="3400" dirty="0"/>
           </a:p>
@@ -9097,13 +8994,13 @@
       </p:sp>
       <p:sp>
         <p:nvSpPr>
-          <p:cNvPr id="14" name="Text 10"/>
+          <p:cNvPr id="10" name="Text 6"/>
           <p:cNvSpPr txBox="1"/>
           <p:nvPr/>
         </p:nvSpPr>
         <p:spPr>
           <a:xfrm>
-            <a:off x="5120640" y="4745736"/>
+            <a:off x="5120640" y="3264408"/>
             <a:ext cx="6400800" cy="868680"/>
           </a:xfrm>
           <a:prstGeom prst="rect">
@@ -9131,6 +9028,179 @@
                 <a:ea typeface="Lato" pitchFamily="34" charset="-122"/>
                 <a:cs typeface="Lato" pitchFamily="34" charset="-120"/>
               </a:rPr>
+              <a:t>Make the same thing look the same everywhere, such as one spelling and one case.</a:t>
+            </a:r>
+            <a:endParaRPr lang="en-US" sz="2200" dirty="0"/>
+          </a:p>
+        </p:txBody>
+      </p:sp>
+      <p:sp>
+        <p:nvSpPr>
+          <p:cNvPr id="11" name="Text 7"/>
+          <p:cNvSpPr txBox="1"/>
+          <p:nvPr/>
+        </p:nvSpPr>
+        <p:spPr>
+          <a:xfrm>
+            <a:off x="5120640" y="4026408"/>
+            <a:ext cx="6400800" cy="566928"/>
+          </a:xfrm>
+          <a:prstGeom prst="rect">
+            <a:avLst/>
+          </a:prstGeom>
+          <a:noFill/>
+          <a:ln/>
+        </p:spPr>
+        <p:txBody>
+          <a:bodyPr wrap="square" lIns="0" tIns="0" rIns="0" bIns="0" rtlCol="0" anchor="t"/>
+          <a:lstStyle/>
+          <a:p>
+            <a:pPr algn="l" indent="0" marL="0">
+              <a:lnSpc>
+                <a:spcPts val="2280"/>
+              </a:lnSpc>
+              <a:buNone/>
+            </a:pPr>
+            <a:r>
+              <a:rPr lang="en-US" sz="1900" i="1" dirty="0">
+                <a:solidFill>
+                  <a:srgbClr val="666666"/>
+                </a:solidFill>
+                <a:latin typeface="Lato" pitchFamily="34" charset="0"/>
+                <a:ea typeface="Lato" pitchFamily="34" charset="-122"/>
+                <a:cs typeface="Lato" pitchFamily="34" charset="-120"/>
+              </a:rPr>
+              <a:t>Writing every name with a capital first letter.</a:t>
+            </a:r>
+            <a:endParaRPr lang="en-US" sz="1900" dirty="0"/>
+          </a:p>
+        </p:txBody>
+      </p:sp>
+      <p:sp>
+        <p:nvSpPr>
+          <p:cNvPr id="12" name="Shape 8"/>
+          <p:cNvSpPr/>
+          <p:nvPr/>
+        </p:nvSpPr>
+        <p:spPr>
+          <a:xfrm>
+            <a:off x="640080" y="4617720"/>
+            <a:ext cx="10881360" cy="0"/>
+          </a:xfrm>
+          <a:prstGeom prst="line">
+            <a:avLst/>
+          </a:prstGeom>
+          <a:noFill/>
+          <a:ln w="12700">
+            <a:solidFill>
+              <a:srgbClr val="CFCFCF"/>
+            </a:solidFill>
+            <a:prstDash val="solid"/>
+          </a:ln>
+        </p:spPr>
+      </p:sp>
+      <p:pic>
+        <p:nvPicPr>
+          <p:cNvPr id="13" name="Image 2" descr="lookup">    </p:cNvPr>
+          <p:cNvPicPr>
+            <a:picLocks noChangeAspect="1"/>
+          </p:cNvPicPr>
+          <p:nvPr/>
+        </p:nvPicPr>
+        <p:blipFill>
+          <a:blip r:embed="rId3"/>
+          <a:stretch>
+            <a:fillRect/>
+          </a:stretch>
+        </p:blipFill>
+        <p:spPr>
+          <a:xfrm>
+            <a:off x="640080" y="4745736"/>
+            <a:ext cx="1188720" cy="1188720"/>
+          </a:xfrm>
+          <a:prstGeom prst="rect">
+            <a:avLst/>
+          </a:prstGeom>
+        </p:spPr>
+      </p:pic>
+      <p:sp>
+        <p:nvSpPr>
+          <p:cNvPr id="14" name="Text 9"/>
+          <p:cNvSpPr txBox="1"/>
+          <p:nvPr/>
+        </p:nvSpPr>
+        <p:spPr>
+          <a:xfrm>
+            <a:off x="2011680" y="4700016"/>
+            <a:ext cx="2926080" cy="1298448"/>
+          </a:xfrm>
+          <a:prstGeom prst="rect">
+            <a:avLst/>
+          </a:prstGeom>
+          <a:noFill/>
+          <a:ln/>
+        </p:spPr>
+        <p:txBody>
+          <a:bodyPr wrap="square" lIns="0" tIns="0" rIns="0" bIns="0" rtlCol="0" anchor="ctr"/>
+          <a:lstStyle/>
+          <a:p>
+            <a:pPr algn="l" indent="0" marL="0">
+              <a:lnSpc>
+                <a:spcPts val="4080"/>
+              </a:lnSpc>
+              <a:buNone/>
+            </a:pPr>
+            <a:r>
+              <a:rPr lang="en-US" sz="3400" b="1" dirty="0">
+                <a:solidFill>
+                  <a:srgbClr val="111111"/>
+                </a:solidFill>
+                <a:latin typeface="Lato" pitchFamily="34" charset="0"/>
+                <a:ea typeface="Lato" pitchFamily="34" charset="-122"/>
+                <a:cs typeface="Lato" pitchFamily="34" charset="-120"/>
+              </a:rPr>
+              <a:t>lookup</a:t>
+            </a:r>
+            <a:endParaRPr lang="en-US" sz="3400" dirty="0"/>
+          </a:p>
+        </p:txBody>
+      </p:sp>
+      <p:sp>
+        <p:nvSpPr>
+          <p:cNvPr id="15" name="Text 10"/>
+          <p:cNvSpPr txBox="1"/>
+          <p:nvPr/>
+        </p:nvSpPr>
+        <p:spPr>
+          <a:xfrm>
+            <a:off x="5120640" y="4745736"/>
+            <a:ext cx="6400800" cy="868680"/>
+          </a:xfrm>
+          <a:prstGeom prst="rect">
+            <a:avLst/>
+          </a:prstGeom>
+          <a:noFill/>
+          <a:ln/>
+        </p:spPr>
+        <p:txBody>
+          <a:bodyPr wrap="square" lIns="0" tIns="0" rIns="0" bIns="0" rtlCol="0" anchor="t"/>
+          <a:lstStyle/>
+          <a:p>
+            <a:pPr algn="l" indent="0" marL="0">
+              <a:lnSpc>
+                <a:spcPts val="2640"/>
+              </a:lnSpc>
+              <a:buNone/>
+            </a:pPr>
+            <a:r>
+              <a:rPr lang="en-US" sz="2200" dirty="0">
+                <a:solidFill>
+                  <a:srgbClr val="111111"/>
+                </a:solidFill>
+                <a:latin typeface="Lato" pitchFamily="34" charset="0"/>
+                <a:ea typeface="Lato" pitchFamily="34" charset="-122"/>
+                <a:cs typeface="Lato" pitchFamily="34" charset="-120"/>
+              </a:rPr>
               <a:t>A dictionary that turns one value into another.</a:t>
             </a:r>
             <a:endParaRPr lang="en-US" sz="2200" dirty="0"/>
@@ -9139,7 +9209,7 @@
       </p:sp>
       <p:sp>
         <p:nvSpPr>
-          <p:cNvPr id="15" name="Text 11"/>
+          <p:cNvPr id="16" name="Text 11"/>
           <p:cNvSpPr txBox="1"/>
           <p:nvPr/>
         </p:nvSpPr>
@@ -10789,7 +10859,7 @@
                 <a:ea typeface="Lato" pitchFamily="34" charset="-122"/>
                 <a:cs typeface="Lato" pitchFamily="34" charset="-120"/>
               </a:rPr>
-              <a:t>Read the first part of the code. 6 lines. Say what each one does.</a:t>
+              <a:t>Predict how many dates cannot be parsed after both formats have been tried.</a:t>
             </a:r>
             <a:endParaRPr lang="en-US" sz="2400" dirty="0"/>
           </a:p>
@@ -10812,7 +10882,7 @@
                 <a:ea typeface="Lato" pitchFamily="34" charset="-122"/>
                 <a:cs typeface="Lato" pitchFamily="34" charset="-120"/>
               </a:rPr>
-              <a:t>The second part comes next.</a:t>
+              <a:t>The rest of the code is on the next slide.</a:t>
             </a:r>
             <a:endParaRPr lang="en-US" sz="2400" dirty="0"/>
           </a:p>
@@ -11533,7 +11603,7 @@
                 <a:ea typeface="Lato" pitchFamily="34" charset="-122"/>
                 <a:cs typeface="Lato" pitchFamily="34" charset="-120"/>
               </a:rPr>
-              <a:t>Predict how many dates cannot be parsed after both formats have been tried.</a:t>
+              <a:t>This is the rest of the code. Keep your guess in mind.</a:t>
             </a:r>
             <a:endParaRPr lang="en-US" sz="2400" dirty="0"/>
           </a:p>
